--- a/reports/09-roadmap.pptx
+++ b/reports/09-roadmap.pptx
@@ -107,7 +107,7 @@
   <p:extLst>
     <p:ext uri="{521415D9-36F7-43E2-AB2F-B90AF26B5E84}">
       <p14:sectionLst xmlns:p14="http://schemas.microsoft.com/office/powerpoint/2010/main">
-        <p14:section name="Roadmap" id="{d30ccc8d-6981-9792-1ab9-68541ef14f9c}">
+        <p14:section name="Roadmap" id="{1a7d0d47-1a2e-705c-c340-16f97af9db7d}">
           <p14:sldIdLst>
             <p14:sldId id="256"/>
           </p14:sldIdLst>
